--- a/docs/MAYA-Executive-Briefing.pptx
+++ b/docs/MAYA-Executive-Briefing.pptx
@@ -13637,7 +13637,7 @@
                 </a:solidFill>
                 <a:latin typeface="Calibri"/>
               </a:rPr>
-              <a:t>The design deck — 123 slides, chapter 26 is the case studies</a:t>
+              <a:t>The design deck — 124 slides, chapter 26 is the case studies</a:t>
             </a:r>
           </a:p>
           <a:p>
@@ -13659,7 +13659,7 @@
                 </a:solidFill>
                 <a:latin typeface="Calibri"/>
               </a:rPr>
-              <a:t>case_studies/ — six models, runnable in a minute each</a:t>
+              <a:t>case_studies/ — eleven models, runnable in a minute each</a:t>
             </a:r>
           </a:p>
           <a:p>

--- a/docs/MAYA-Executive-Briefing.pptx
+++ b/docs/MAYA-Executive-Briefing.pptx
@@ -13659,7 +13659,7 @@
                 </a:solidFill>
                 <a:latin typeface="Calibri"/>
               </a:rPr>
-              <a:t>case_studies/ — eleven models, runnable in a minute each</a:t>
+              <a:t>case_studies/ — twelve models, runnable in a minute each</a:t>
             </a:r>
           </a:p>
           <a:p>

--- a/docs/MAYA-Executive-Briefing.pptx
+++ b/docs/MAYA-Executive-Briefing.pptx
@@ -13637,7 +13637,7 @@
                 </a:solidFill>
                 <a:latin typeface="Calibri"/>
               </a:rPr>
-              <a:t>The design deck — 124 slides, chapter 26 is the case studies</a:t>
+              <a:t>The design deck — 125 slides, chapter 26 is the case studies</a:t>
             </a:r>
           </a:p>
           <a:p>
@@ -13659,7 +13659,7 @@
                 </a:solidFill>
                 <a:latin typeface="Calibri"/>
               </a:rPr>
-              <a:t>case_studies/ — twelve models, runnable in a minute each</a:t>
+              <a:t>case_studies/ — thirteen models, runnable in a minute each</a:t>
             </a:r>
           </a:p>
           <a:p>

--- a/docs/MAYA-Executive-Briefing.pptx
+++ b/docs/MAYA-Executive-Briefing.pptx
@@ -9927,7 +9927,7 @@
                           </a:solidFill>
                           <a:latin typeface="Calibri"/>
                         </a:rPr>
-                        <a:t>The source, the schema and 3,635 tests are the bank's. The design documents explain WHY, not only what</a:t>
+                        <a:t>The source, the schema and 3,914 tests are the bank's. The design documents explain WHY, not only what</a:t>
                       </a:r>
                     </a:p>
                   </a:txBody>

--- a/docs/MAYA-Executive-Briefing.pptx
+++ b/docs/MAYA-Executive-Briefing.pptx
@@ -13637,7 +13637,7 @@
                 </a:solidFill>
                 <a:latin typeface="Calibri"/>
               </a:rPr>
-              <a:t>The design deck — 125 slides, chapter 26 is the case studies</a:t>
+              <a:t>The design deck — 127 slides, chapter 26 is the case studies</a:t>
             </a:r>
           </a:p>
           <a:p>

--- a/docs/MAYA-Executive-Briefing.pptx
+++ b/docs/MAYA-Executive-Briefing.pptx
@@ -9400,9 +9400,9 @@
                 </a:solidFill>
                 <a:latin typeface="Calibri"/>
               </a:rPr>
-              <a:t>Connectors to MLflow, Unity Catalog and git. Bulk import exists; models already in an ML platform are entered by hand.
-Discovery. The inventory is what somebody registered — it finds nothing nobody declared.
-Asymmetric warrant signatures. Verifying a warrant today means holding the key that could mint one; this is the largest gap.
+              <a:t>An EUC sweep. MAYA publishes the contract a scanner must meet and takes delivery; it does not crawl the bank's drives, and nobody here runs a scanner yet.
+Connectors past MLflow, Unity Catalog and git — SageMaker, Vertex, SAS, the CMDB — and the push-status-back direction of all of them.
+Rule-set import from a spreadsheet or a DMN file. This is the work that decides whether the EUC estate is a demonstration or a programme.
 Scale beyond a single process, and every performance figure in the documents is a target rather than a measurement.</a:t>
             </a:r>
           </a:p>
@@ -11468,7 +11468,7 @@
         </p:nvGraphicFramePr>
         <p:xfrm>
           <a:off x="777240" y="1353312"/>
-          <a:ext cx="10637213" cy="1856382"/>
+          <a:ext cx="10637213" cy="2043859"/>
         </p:xfrm>
         <a:graphic>
           <a:graphicData uri="http://schemas.openxmlformats.org/drawingml/2006/table">
@@ -11765,7 +11765,7 @@
                   </a:tcPr>
                 </a:tc>
               </a:tr>
-              <a:tr h="333781">
+              <a:tr h="521258">
                 <a:tc>
                   <a:txBody>
                     <a:bodyPr wrap="square"/>
@@ -11802,7 +11802,7 @@
                           </a:solidFill>
                           <a:latin typeface="Calibri"/>
                         </a:rPr>
-                        <a:t>Asymmetric signatures; an examination rehearsal end to end</a:t>
+                        <a:t>A discovery sweep against the published contract; an examination rehearsal end to end</a:t>
                       </a:r>
                     </a:p>
                   </a:txBody>
@@ -11825,7 +11825,7 @@
                           </a:solidFill>
                           <a:latin typeface="Calibri"/>
                         </a:rPr>
-                        <a:t>A warrant can be verified by somebody who could not mint one</a:t>
+                        <a:t>The inventory includes what nobody declared, and a supervisor's request is answered from the register rather than assembled</a:t>
                       </a:r>
                     </a:p>
                   </a:txBody>
@@ -11848,7 +11848,7 @@
         </p:nvSpPr>
         <p:spPr>
           <a:xfrm>
-            <a:off x="777240" y="3502304"/>
+            <a:off x="777240" y="3689781"/>
             <a:ext cx="10637215" cy="1280160"/>
           </a:xfrm>
           <a:prstGeom prst="rect">

--- a/docs/MAYA-Executive-Briefing.pptx
+++ b/docs/MAYA-Executive-Briefing.pptx
@@ -13637,7 +13637,7 @@
                 </a:solidFill>
                 <a:latin typeface="Calibri"/>
               </a:rPr>
-              <a:t>The design deck — 127 slides, chapter 26 is the case studies</a:t>
+              <a:t>The design deck — 128 slides, chapter 26 is the case studies</a:t>
             </a:r>
           </a:p>
           <a:p>
